--- a/review1/2024178011 review-1 [Autosaved].pptx
+++ b/review1/2024178011 review-1 [Autosaved].pptx
@@ -245,7 +245,7 @@
           <a:p>
             <a:fld id="{94B322E9-8FCB-4E36-92B9-AAA94F993B43}" type="datetimeFigureOut">
               <a:rPr lang="en-IN" smtClean="0"/>
-              <a:t>26-01-2026</a:t>
+              <a:t>27-01-2026</a:t>
             </a:fld>
             <a:endParaRPr lang="en-IN"/>
           </a:p>
@@ -1152,7 +1152,7 @@
           <a:p>
             <a:fld id="{A8C48ACE-AE27-47B1-B7D4-7EF694A9D53C}" type="datetimeFigureOut">
               <a:rPr lang="en-IN" smtClean="0"/>
-              <a:t>26-01-2026</a:t>
+              <a:t>27-01-2026</a:t>
             </a:fld>
             <a:endParaRPr lang="en-IN"/>
           </a:p>
@@ -1352,7 +1352,7 @@
           <a:p>
             <a:fld id="{A8C48ACE-AE27-47B1-B7D4-7EF694A9D53C}" type="datetimeFigureOut">
               <a:rPr lang="en-IN" smtClean="0"/>
-              <a:t>26-01-2026</a:t>
+              <a:t>27-01-2026</a:t>
             </a:fld>
             <a:endParaRPr lang="en-IN"/>
           </a:p>
@@ -1562,7 +1562,7 @@
           <a:p>
             <a:fld id="{A8C48ACE-AE27-47B1-B7D4-7EF694A9D53C}" type="datetimeFigureOut">
               <a:rPr lang="en-IN" smtClean="0"/>
-              <a:t>26-01-2026</a:t>
+              <a:t>27-01-2026</a:t>
             </a:fld>
             <a:endParaRPr lang="en-IN"/>
           </a:p>
@@ -1762,7 +1762,7 @@
           <a:p>
             <a:fld id="{A8C48ACE-AE27-47B1-B7D4-7EF694A9D53C}" type="datetimeFigureOut">
               <a:rPr lang="en-IN" smtClean="0"/>
-              <a:t>26-01-2026</a:t>
+              <a:t>27-01-2026</a:t>
             </a:fld>
             <a:endParaRPr lang="en-IN"/>
           </a:p>
@@ -2038,7 +2038,7 @@
           <a:p>
             <a:fld id="{A8C48ACE-AE27-47B1-B7D4-7EF694A9D53C}" type="datetimeFigureOut">
               <a:rPr lang="en-IN" smtClean="0"/>
-              <a:t>26-01-2026</a:t>
+              <a:t>27-01-2026</a:t>
             </a:fld>
             <a:endParaRPr lang="en-IN"/>
           </a:p>
@@ -2306,7 +2306,7 @@
           <a:p>
             <a:fld id="{A8C48ACE-AE27-47B1-B7D4-7EF694A9D53C}" type="datetimeFigureOut">
               <a:rPr lang="en-IN" smtClean="0"/>
-              <a:t>26-01-2026</a:t>
+              <a:t>27-01-2026</a:t>
             </a:fld>
             <a:endParaRPr lang="en-IN"/>
           </a:p>
@@ -2721,7 +2721,7 @@
           <a:p>
             <a:fld id="{A8C48ACE-AE27-47B1-B7D4-7EF694A9D53C}" type="datetimeFigureOut">
               <a:rPr lang="en-IN" smtClean="0"/>
-              <a:t>26-01-2026</a:t>
+              <a:t>27-01-2026</a:t>
             </a:fld>
             <a:endParaRPr lang="en-IN"/>
           </a:p>
@@ -2863,7 +2863,7 @@
           <a:p>
             <a:fld id="{A8C48ACE-AE27-47B1-B7D4-7EF694A9D53C}" type="datetimeFigureOut">
               <a:rPr lang="en-IN" smtClean="0"/>
-              <a:t>26-01-2026</a:t>
+              <a:t>27-01-2026</a:t>
             </a:fld>
             <a:endParaRPr lang="en-IN"/>
           </a:p>
@@ -2976,7 +2976,7 @@
           <a:p>
             <a:fld id="{A8C48ACE-AE27-47B1-B7D4-7EF694A9D53C}" type="datetimeFigureOut">
               <a:rPr lang="en-IN" smtClean="0"/>
-              <a:t>26-01-2026</a:t>
+              <a:t>27-01-2026</a:t>
             </a:fld>
             <a:endParaRPr lang="en-IN"/>
           </a:p>
@@ -3289,7 +3289,7 @@
           <a:p>
             <a:fld id="{A8C48ACE-AE27-47B1-B7D4-7EF694A9D53C}" type="datetimeFigureOut">
               <a:rPr lang="en-IN" smtClean="0"/>
-              <a:t>26-01-2026</a:t>
+              <a:t>27-01-2026</a:t>
             </a:fld>
             <a:endParaRPr lang="en-IN"/>
           </a:p>
@@ -3578,7 +3578,7 @@
           <a:p>
             <a:fld id="{A8C48ACE-AE27-47B1-B7D4-7EF694A9D53C}" type="datetimeFigureOut">
               <a:rPr lang="en-IN" smtClean="0"/>
-              <a:t>26-01-2026</a:t>
+              <a:t>27-01-2026</a:t>
             </a:fld>
             <a:endParaRPr lang="en-IN"/>
           </a:p>
@@ -3821,7 +3821,7 @@
           <a:p>
             <a:fld id="{A8C48ACE-AE27-47B1-B7D4-7EF694A9D53C}" type="datetimeFigureOut">
               <a:rPr lang="en-IN" smtClean="0"/>
-              <a:t>26-01-2026</a:t>
+              <a:t>27-01-2026</a:t>
             </a:fld>
             <a:endParaRPr lang="en-IN"/>
           </a:p>
@@ -4222,8 +4222,16 @@
 </file>
 
 <file path=ppt/slides/slide1.xml><?xml version="1.0" encoding="utf-8"?>
-<p:sld xmlns:a="http://schemas.openxmlformats.org/drawingml/2006/main" xmlns:r="http://schemas.openxmlformats.org/officeDocument/2006/relationships" xmlns:p="http://schemas.openxmlformats.org/presentationml/2006/main">
+<p:sld xmlns:a="http://schemas.openxmlformats.org/drawingml/2006/main" xmlns:r="http://schemas.openxmlformats.org/officeDocument/2006/relationships" xmlns:p="http://schemas.openxmlformats.org/presentationml/2006/main" showMasterSp="0">
   <p:cSld>
+    <p:bg>
+      <p:bgPr>
+        <a:solidFill>
+          <a:schemeClr val="bg1"/>
+        </a:solidFill>
+        <a:effectLst/>
+      </p:bgPr>
+    </p:bg>
     <p:spTree>
       <p:nvGrpSpPr>
         <p:cNvPr id="1" name=""/>
@@ -6637,6 +6645,12 @@
             <a:pPr marL="457200" lvl="1" indent="0">
               <a:buNone/>
             </a:pPr>
+            <a:endParaRPr lang="en-US" sz="2000" b="1" dirty="0"/>
+          </a:p>
+          <a:p>
+            <a:pPr marL="457200" lvl="1" indent="0">
+              <a:buNone/>
+            </a:pPr>
             <a:r>
               <a:rPr lang="en-US" sz="2000" b="1" dirty="0"/>
               <a:t>Sample Output:</a:t>
@@ -6644,66 +6658,192 @@
           </a:p>
         </p:txBody>
       </p:sp>
-      <p:pic>
-        <p:nvPicPr>
-          <p:cNvPr id="5" name="Picture 4">
+      <p:sp>
+        <p:nvSpPr>
+          <p:cNvPr id="6" name="TextBox 5">
             <a:extLst>
               <a:ext uri="{FF2B5EF4-FFF2-40B4-BE49-F238E27FC236}">
-                <a16:creationId xmlns:a16="http://schemas.microsoft.com/office/drawing/2014/main" id="{0123AC6F-1C92-F5C9-4DD1-2C6E6C1FD56E}"/>
+                <a16:creationId xmlns:a16="http://schemas.microsoft.com/office/drawing/2014/main" id="{B4BAA761-97D5-6294-CD2C-8D07E046B772}"/>
               </a:ext>
             </a:extLst>
           </p:cNvPr>
-          <p:cNvPicPr>
-            <a:picLocks noChangeAspect="1"/>
-          </p:cNvPicPr>
+          <p:cNvSpPr txBox="1"/>
           <p:nvPr/>
-        </p:nvPicPr>
-        <p:blipFill>
-          <a:blip r:embed="rId2"/>
-          <a:stretch>
-            <a:fillRect/>
-          </a:stretch>
-        </p:blipFill>
+        </p:nvSpPr>
         <p:spPr>
           <a:xfrm>
-            <a:off x="2015253" y="2714813"/>
-            <a:ext cx="2516989" cy="1428373"/>
+            <a:off x="1951642" y="2561434"/>
+            <a:ext cx="6097248" cy="1462965"/>
           </a:xfrm>
           <a:prstGeom prst="rect">
             <a:avLst/>
           </a:prstGeom>
+          <a:noFill/>
         </p:spPr>
-      </p:pic>
-      <p:pic>
-        <p:nvPicPr>
-          <p:cNvPr id="7" name="Picture 6">
+        <p:txBody>
+          <a:bodyPr wrap="square">
+            <a:spAutoFit/>
+          </a:bodyPr>
+          <a:lstStyle/>
+          <a:p>
+            <a:pPr>
+              <a:lnSpc>
+                <a:spcPct val="90000"/>
+              </a:lnSpc>
+              <a:spcBef>
+                <a:spcPts val="500"/>
+              </a:spcBef>
+            </a:pPr>
+            <a:r>
+              <a:rPr lang="en-IN" sz="1600" dirty="0">
+                <a:latin typeface="Courier New" panose="02070309020205020404" pitchFamily="49" charset="0"/>
+              </a:rPr>
+              <a:t>MP33 landmark (left shoulder):</a:t>
+            </a:r>
+          </a:p>
+          <a:p>
+            <a:pPr>
+              <a:lnSpc>
+                <a:spcPct val="90000"/>
+              </a:lnSpc>
+              <a:spcBef>
+                <a:spcPts val="500"/>
+              </a:spcBef>
+            </a:pPr>
+            <a:r>
+              <a:rPr lang="en-IN" sz="1600" dirty="0">
+                <a:latin typeface="Courier New" panose="02070309020205020404" pitchFamily="49" charset="0"/>
+              </a:rPr>
+              <a:t>(x = 0.42, y = 0.36)</a:t>
+            </a:r>
+          </a:p>
+          <a:p>
+            <a:pPr>
+              <a:lnSpc>
+                <a:spcPct val="90000"/>
+              </a:lnSpc>
+              <a:spcBef>
+                <a:spcPts val="500"/>
+              </a:spcBef>
+            </a:pPr>
+            <a:r>
+              <a:rPr lang="en-IN" sz="1600" dirty="0">
+                <a:latin typeface="Courier New" panose="02070309020205020404" pitchFamily="49" charset="0"/>
+              </a:rPr>
+              <a:t>Bounding Box:</a:t>
+            </a:r>
+          </a:p>
+          <a:p>
+            <a:pPr>
+              <a:lnSpc>
+                <a:spcPct val="90000"/>
+              </a:lnSpc>
+              <a:spcBef>
+                <a:spcPts val="500"/>
+              </a:spcBef>
+            </a:pPr>
+            <a:r>
+              <a:rPr lang="en-IN" sz="1600" dirty="0">
+                <a:latin typeface="Courier New" panose="02070309020205020404" pitchFamily="49" charset="0"/>
+              </a:rPr>
+              <a:t>x1 = 400, y1 = 150</a:t>
+            </a:r>
+          </a:p>
+          <a:p>
+            <a:pPr>
+              <a:lnSpc>
+                <a:spcPct val="90000"/>
+              </a:lnSpc>
+              <a:spcBef>
+                <a:spcPts val="500"/>
+              </a:spcBef>
+            </a:pPr>
+            <a:r>
+              <a:rPr lang="en-IN" sz="1600" dirty="0">
+                <a:latin typeface="Courier New" panose="02070309020205020404" pitchFamily="49" charset="0"/>
+              </a:rPr>
+              <a:t>width = 200, height = 400</a:t>
+            </a:r>
+          </a:p>
+        </p:txBody>
+      </p:sp>
+      <p:sp>
+        <p:nvSpPr>
+          <p:cNvPr id="9" name="TextBox 8">
             <a:extLst>
               <a:ext uri="{FF2B5EF4-FFF2-40B4-BE49-F238E27FC236}">
-                <a16:creationId xmlns:a16="http://schemas.microsoft.com/office/drawing/2014/main" id="{DFE4D8CD-05D6-E016-76B4-A670D8EAF936}"/>
+                <a16:creationId xmlns:a16="http://schemas.microsoft.com/office/drawing/2014/main" id="{BFDB0BF5-2CE2-4AD5-D0A5-7F6F73528AFD}"/>
               </a:ext>
             </a:extLst>
           </p:cNvPr>
-          <p:cNvPicPr>
-            <a:picLocks noChangeAspect="1"/>
-          </p:cNvPicPr>
+          <p:cNvSpPr txBox="1"/>
           <p:nvPr/>
-        </p:nvPicPr>
-        <p:blipFill>
-          <a:blip r:embed="rId3"/>
-          <a:stretch>
-            <a:fillRect/>
-          </a:stretch>
-        </p:blipFill>
+        </p:nvSpPr>
         <p:spPr>
           <a:xfrm>
-            <a:off x="1951642" y="4818114"/>
-            <a:ext cx="2945967" cy="1193071"/>
+            <a:off x="1951642" y="4868969"/>
+            <a:ext cx="6097248" cy="891526"/>
           </a:xfrm>
           <a:prstGeom prst="rect">
             <a:avLst/>
           </a:prstGeom>
+          <a:noFill/>
         </p:spPr>
-      </p:pic>
+        <p:txBody>
+          <a:bodyPr wrap="square">
+            <a:spAutoFit/>
+          </a:bodyPr>
+          <a:lstStyle/>
+          <a:p>
+            <a:pPr>
+              <a:lnSpc>
+                <a:spcPct val="90000"/>
+              </a:lnSpc>
+              <a:spcBef>
+                <a:spcPts val="500"/>
+              </a:spcBef>
+            </a:pPr>
+            <a:r>
+              <a:rPr lang="en-IN" sz="1600" dirty="0">
+                <a:latin typeface="Courier New" panose="02070309020205020404" pitchFamily="49" charset="0"/>
+              </a:rPr>
+              <a:t>COCO-17 left shoulder:</a:t>
+            </a:r>
+          </a:p>
+          <a:p>
+            <a:pPr>
+              <a:lnSpc>
+                <a:spcPct val="90000"/>
+              </a:lnSpc>
+              <a:spcBef>
+                <a:spcPts val="500"/>
+              </a:spcBef>
+            </a:pPr>
+            <a:r>
+              <a:rPr lang="en-IN" sz="1600" dirty="0">
+                <a:latin typeface="Courier New" panose="02070309020205020404" pitchFamily="49" charset="0"/>
+              </a:rPr>
+              <a:t>X = 400 + 0.42 x 200 = 484</a:t>
+            </a:r>
+          </a:p>
+          <a:p>
+            <a:pPr>
+              <a:lnSpc>
+                <a:spcPct val="90000"/>
+              </a:lnSpc>
+              <a:spcBef>
+                <a:spcPts val="500"/>
+              </a:spcBef>
+            </a:pPr>
+            <a:r>
+              <a:rPr lang="en-IN" sz="1600" dirty="0">
+                <a:latin typeface="Courier New" panose="02070309020205020404" pitchFamily="49" charset="0"/>
+              </a:rPr>
+              <a:t>y = 150 + 0.36 x 400 = 294</a:t>
+            </a:r>
+          </a:p>
+        </p:txBody>
+      </p:sp>
     </p:spTree>
     <p:extLst>
       <p:ext uri="{BB962C8B-B14F-4D97-AF65-F5344CB8AC3E}">
@@ -8904,66 +9044,104 @@
           </a:p>
         </p:txBody>
       </p:sp>
-      <p:pic>
-        <p:nvPicPr>
-          <p:cNvPr id="5" name="Picture 4">
+      <p:sp>
+        <p:nvSpPr>
+          <p:cNvPr id="6" name="TextBox 5">
             <a:extLst>
               <a:ext uri="{FF2B5EF4-FFF2-40B4-BE49-F238E27FC236}">
-                <a16:creationId xmlns:a16="http://schemas.microsoft.com/office/drawing/2014/main" id="{FA6DA435-6FAA-455D-3EF1-01410125C301}"/>
+                <a16:creationId xmlns:a16="http://schemas.microsoft.com/office/drawing/2014/main" id="{371F423F-AEEF-941C-32A0-A91260FEFF14}"/>
               </a:ext>
             </a:extLst>
           </p:cNvPr>
-          <p:cNvPicPr>
-            <a:picLocks noChangeAspect="1"/>
-          </p:cNvPicPr>
+          <p:cNvSpPr txBox="1"/>
           <p:nvPr/>
-        </p:nvPicPr>
-        <p:blipFill>
-          <a:blip r:embed="rId2"/>
-          <a:stretch>
-            <a:fillRect/>
-          </a:stretch>
-        </p:blipFill>
+        </p:nvSpPr>
         <p:spPr>
           <a:xfrm>
-            <a:off x="1097116" y="3259189"/>
-            <a:ext cx="2817446" cy="1023730"/>
+            <a:off x="1459667" y="3096353"/>
+            <a:ext cx="6097248" cy="830997"/>
           </a:xfrm>
           <a:prstGeom prst="rect">
             <a:avLst/>
           </a:prstGeom>
+          <a:noFill/>
         </p:spPr>
-      </p:pic>
-      <p:pic>
-        <p:nvPicPr>
-          <p:cNvPr id="7" name="Picture 6">
+        <p:txBody>
+          <a:bodyPr wrap="square">
+            <a:spAutoFit/>
+          </a:bodyPr>
+          <a:lstStyle/>
+          <a:p>
+            <a:r>
+              <a:rPr lang="en-IN" sz="1600" dirty="0">
+                <a:latin typeface="Courier New" panose="02070309020205020404" pitchFamily="49" charset="0"/>
+              </a:rPr>
+              <a:t>Frame 40:</a:t>
+            </a:r>
+          </a:p>
+          <a:p>
+            <a:r>
+              <a:rPr lang="en-IN" sz="1600" dirty="0">
+                <a:latin typeface="Courier New" panose="02070309020205020404" pitchFamily="49" charset="0"/>
+              </a:rPr>
+              <a:t>Left Hip = (-0.12, 0.05)</a:t>
+            </a:r>
+          </a:p>
+          <a:p>
+            <a:r>
+              <a:rPr lang="en-IN" sz="1600" dirty="0">
+                <a:latin typeface="Courier New" panose="02070309020205020404" pitchFamily="49" charset="0"/>
+              </a:rPr>
+              <a:t>Right Hip = ( 0.08, 0.04)</a:t>
+            </a:r>
+          </a:p>
+        </p:txBody>
+      </p:sp>
+      <p:sp>
+        <p:nvSpPr>
+          <p:cNvPr id="9" name="TextBox 8">
             <a:extLst>
               <a:ext uri="{FF2B5EF4-FFF2-40B4-BE49-F238E27FC236}">
-                <a16:creationId xmlns:a16="http://schemas.microsoft.com/office/drawing/2014/main" id="{4227F6AB-3E01-7895-F45D-66F8D94FC6FD}"/>
+                <a16:creationId xmlns:a16="http://schemas.microsoft.com/office/drawing/2014/main" id="{7AFEB0E6-1B7D-4FB9-0128-DD5199107822}"/>
               </a:ext>
             </a:extLst>
           </p:cNvPr>
-          <p:cNvPicPr>
-            <a:picLocks noChangeAspect="1"/>
-          </p:cNvPicPr>
+          <p:cNvSpPr txBox="1"/>
           <p:nvPr/>
-        </p:nvPicPr>
-        <p:blipFill>
-          <a:blip r:embed="rId3"/>
-          <a:stretch>
-            <a:fillRect/>
-          </a:stretch>
-        </p:blipFill>
+        </p:nvSpPr>
         <p:spPr>
           <a:xfrm>
-            <a:off x="1097116" y="5069887"/>
-            <a:ext cx="4303173" cy="867575"/>
+            <a:off x="1339746" y="5105744"/>
+            <a:ext cx="6097248" cy="584775"/>
           </a:xfrm>
           <a:prstGeom prst="rect">
             <a:avLst/>
           </a:prstGeom>
+          <a:noFill/>
         </p:spPr>
-      </p:pic>
+        <p:txBody>
+          <a:bodyPr wrap="square">
+            <a:spAutoFit/>
+          </a:bodyPr>
+          <a:lstStyle/>
+          <a:p>
+            <a:r>
+              <a:rPr lang="en-IN" sz="1600" dirty="0">
+                <a:latin typeface="Courier New" panose="02070309020205020404" pitchFamily="49" charset="0"/>
+              </a:rPr>
+              <a:t>Pelvis(40) = ((-0.12 + 0.08)/2, (0.05+0.04)/2)</a:t>
+            </a:r>
+          </a:p>
+          <a:p>
+            <a:r>
+              <a:rPr lang="en-IN" sz="1600" dirty="0">
+                <a:latin typeface="Courier New" panose="02070309020205020404" pitchFamily="49" charset="0"/>
+              </a:rPr>
+              <a:t>	= (-0.02, 0.045)</a:t>
+            </a:r>
+          </a:p>
+        </p:txBody>
+      </p:sp>
     </p:spTree>
     <p:extLst>
       <p:ext uri="{BB962C8B-B14F-4D97-AF65-F5344CB8AC3E}">
@@ -12085,7 +12263,7 @@
         </p:blipFill>
         <p:spPr>
           <a:xfrm>
-            <a:off x="274512" y="4242277"/>
+            <a:off x="274512" y="4197306"/>
             <a:ext cx="11642975" cy="1934686"/>
           </a:xfrm>
           <a:prstGeom prst="rect">
@@ -12210,7 +12388,7 @@
             </a:r>
             <a:r>
               <a:rPr lang="en-IN" sz="2000" b="1" dirty="0"/>
-              <a:t>Deterministic Euclidean Distance Computation</a:t>
+              <a:t>Deterministic Distance Computation</a:t>
             </a:r>
           </a:p>
           <a:p>
@@ -16419,8 +16597,17 @@
               <a:rPr lang="en-IN" sz="1600" dirty="0">
                 <a:latin typeface="Courier New" panose="02070309020205020404" pitchFamily="49" charset="0"/>
               </a:rPr>
-              <a:t>BASELINE_FRAMES = 115</a:t>
-            </a:r>
+              <a:t>BASELINE_FRAMES = </a:t>
+            </a:r>
+            <a:r>
+              <a:rPr lang="en-IN" sz="1600" dirty="0" err="1">
+                <a:latin typeface="Courier New" panose="02070309020205020404" pitchFamily="49" charset="0"/>
+              </a:rPr>
+              <a:t>Expert_Total_Frames</a:t>
+            </a:r>
+            <a:endParaRPr lang="en-IN" sz="1600" dirty="0">
+              <a:latin typeface="Courier New" panose="02070309020205020404" pitchFamily="49" charset="0"/>
+            </a:endParaRPr>
           </a:p>
           <a:p>
             <a:pPr>
@@ -16990,6 +17177,11 @@
           </p:cNvGraphicFramePr>
           <p:nvPr>
             <p:ph idx="1"/>
+            <p:extLst>
+              <p:ext uri="{D42A27DB-BD31-4B8C-83A1-F6EECF244321}">
+                <p14:modId xmlns:p14="http://schemas.microsoft.com/office/powerpoint/2010/main" val="2930886025"/>
+              </p:ext>
+            </p:extLst>
           </p:nvPr>
         </p:nvGraphicFramePr>
         <p:xfrm>
@@ -17712,37 +17904,16 @@
                       </a:pPr>
                       <a:r>
                         <a:rPr lang="en-US" sz="1600" dirty="0"/>
-                        <a:t>Lin et al. (2020), </a:t>
+                        <a:t>Meinard Müller. Dynamic time warping. In Information Retrieval for Music and Motion Springer, 2007. </a:t>
                       </a:r>
-                      <a:r>
-                        <a:rPr lang="en-US" sz="1600" i="1" dirty="0"/>
-                        <a:t>Applied Sciences (MDPI)</a:t>
-                      </a:r>
+                    </a:p>
+                    <a:p>
+                      <a:pPr>
+                        <a:buNone/>
+                      </a:pPr>
                       <a:r>
                         <a:rPr lang="en-US" sz="1600" dirty="0"/>
-                        <a:t> — </a:t>
-                      </a:r>
-                      <a:r>
-                        <a:rPr lang="en-US" sz="1600" i="1" dirty="0"/>
-                        <a:t>Fall detection based on </a:t>
-                      </a:r>
-                      <a:r>
-                        <a:rPr lang="en-US" sz="1600" i="1" dirty="0" err="1"/>
-                        <a:t>OpenPose</a:t>
-                      </a:r>
-                      <a:r>
-                        <a:rPr lang="en-US" sz="1600" dirty="0"/>
-                        <a:t>. (</a:t>
-                      </a:r>
-                      <a:r>
-                        <a:rPr lang="en-US" sz="1600" dirty="0">
-                          <a:hlinkClick r:id="rId3" tooltip="A Framework for Fall Detection Based on OpenPose ..."/>
-                        </a:rPr>
-                        <a:t>MDPI</a:t>
-                      </a:r>
-                      <a:r>
-                        <a:rPr lang="en-US" sz="1600" dirty="0"/>
-                        <a:t>)</a:t>
+                        <a:t>ISBN 978-3-540-74047-9.</a:t>
                       </a:r>
                     </a:p>
                   </a:txBody>
@@ -18124,7 +18295,7 @@
                       </a:r>
                       <a:r>
                         <a:rPr lang="en-IN" sz="1600" dirty="0">
-                          <a:hlinkClick r:id="rId4" tooltip="One-shot skeleton-based action recognition on strength and ..."/>
+                          <a:hlinkClick r:id="rId3" tooltip="One-shot skeleton-based action recognition on strength and ..."/>
                         </a:rPr>
                         <a:t>CVF Open Access</a:t>
                       </a:r>

--- a/review1/2024178011 review-1 [Autosaved].pptx
+++ b/review1/2024178011 review-1 [Autosaved].pptx
@@ -19823,7 +19823,7 @@
         </p:nvSpPr>
         <p:spPr>
           <a:xfrm>
-            <a:off x="838200" y="46898"/>
+            <a:off x="838200" y="31908"/>
             <a:ext cx="10515600" cy="1325563"/>
           </a:xfrm>
         </p:spPr>
